--- a/materialien/Videos/06_Hash_Signatur_Zertifikat/KR_Video_06_Hash_Signatur_Zertifikat_Folien.pptx
+++ b/materialien/Videos/06_Hash_Signatur_Zertifikat/KR_Video_06_Hash_Signatur_Zertifikat_Folien.pptx
@@ -124,63 +124,63 @@
   <p:extLst>
     <p:ext uri="{521415D9-36F7-43E2-AB2F-B90AF26B5E84}">
       <p14:sectionLst xmlns:p14="http://schemas.microsoft.com/office/powerpoint/2010/main">
-        <p14:section name="Einstieg" id="{5db816df-f783-5854-4ddc-8e8ba8db5bfb}">
+        <p14:section name="Einstieg" id="{97227ebc-92a9-0c10-b1fe-d58eb7003993}">
           <p14:sldIdLst>
             <p14:sldId id="256"/>
             <p14:sldId id="257"/>
           </p14:sldIdLst>
         </p14:section>
-        <p14:section name="Schutzziele" id="{f2f3272e-facd-0d03-ee15-5b9bf3e060f0}">
+        <p14:section name="Schutzziele" id="{b3234f5b-5f6e-a28b-7333-968f336a7452}">
           <p14:sldIdLst>
             <p14:sldId id="258"/>
           </p14:sldIdLst>
         </p14:section>
-        <p14:section name="Hashfunktionen" id="{24467145-29d0-5db2-090a-e794da24c7f6}">
+        <p14:section name="Hashfunktionen" id="{c268da43-f6f2-7299-85c3-30dbb76f33b5}">
           <p14:sldIdLst>
             <p14:sldId id="259"/>
             <p14:sldId id="260"/>
           </p14:sldIdLst>
         </p14:section>
-        <p14:section name="Selbst ausprobieren" id="{9c33c0ca-d2a7-d049-ccc1-632858948ac4}">
+        <p14:section name="Selbst ausprobieren" id="{67630c4f-9f46-d96d-0b1d-a5f42b1d9455}">
           <p14:sldIdLst>
             <p14:sldId id="261"/>
             <p14:sldId id="262"/>
           </p14:sldIdLst>
         </p14:section>
-        <p14:section name="Kollisionen" id="{ce4e5759-150c-745b-def8-5f6f49fa530e}">
+        <p14:section name="Kollisionen" id="{9c2923c7-9d2c-7daa-922c-4e34d1acbadf}">
           <p14:sldIdLst>
             <p14:sldId id="263"/>
             <p14:sldId id="264"/>
           </p14:sldIdLst>
         </p14:section>
-        <p14:section name="Signatur" id="{ce1ab897-67cf-876b-028b-cefc10684c31}">
+        <p14:section name="Signatur" id="{57f32fcd-cc55-380a-b084-8856e31a62c8}">
           <p14:sldIdLst>
             <p14:sldId id="265"/>
             <p14:sldId id="266"/>
             <p14:sldId id="267"/>
           </p14:sldIdLst>
         </p14:section>
-        <p14:section name="Man-in-the-Middle" id="{6752eb42-c10c-df4b-939d-210d18ffacc6}">
+        <p14:section name="Man-in-the-Middle" id="{e8d24e74-0ccb-8231-3e7b-e39ceb241e5d}">
           <p14:sldIdLst>
             <p14:sldId id="268"/>
           </p14:sldIdLst>
         </p14:section>
-        <p14:section name="Zertifikate" id="{9a22214a-144e-c3f2-838d-bf2ccd49e7a2}">
+        <p14:section name="Zertifikate" id="{3eff4322-ddac-a07f-93e3-256484afaabb}">
           <p14:sldIdLst>
             <p14:sldId id="269"/>
           </p14:sldIdLst>
         </p14:section>
-        <p14:section name="TLS" id="{2a453de3-28d5-96e9-ed85-8308aedc7e33}">
+        <p14:section name="TLS" id="{2a4e02b5-b39c-a384-850e-aa3dce4d86e1}">
           <p14:sldIdLst>
             <p14:sldId id="270"/>
           </p14:sldIdLst>
         </p14:section>
-        <p14:section name="Typische Fehler" id="{89bf4e7a-a239-9f00-7365-fdb99135bd9e}">
+        <p14:section name="Typische Fehler" id="{36d8bda5-f779-c203-82c0-fdb2caf90845}">
           <p14:sldIdLst>
             <p14:sldId id="271"/>
           </p14:sldIdLst>
         </p14:section>
-        <p14:section name="Zusammenfassung" id="{1599754e-3937-6eab-d120-4ef29b634f22}">
+        <p14:section name="Zusammenfassung" id="{5228bef9-0d2b-9720-873e-55b47ac2bbb4}">
           <p14:sldIdLst>
             <p14:sldId id="272"/>
             <p14:sldId id="273"/>
@@ -5714,11 +5714,11 @@
         <p:spPr>
           <a:xfrm>
             <a:off x="1097280" y="1508760"/>
-            <a:ext cx="9997135" cy="4349496"/>
+            <a:ext cx="6217920" cy="4663440"/>
           </a:xfrm>
           <a:prstGeom prst="roundRect">
             <a:avLst>
-              <a:gd name="adj" fmla="val 2102"/>
+              <a:gd name="adj" fmla="val 1961"/>
             </a:avLst>
           </a:prstGeom>
           <a:solidFill>
@@ -5780,7 +5780,7 @@
         <p:spPr>
           <a:xfrm>
             <a:off x="1508760" y="2240280"/>
-            <a:ext cx="9174175" cy="727456"/>
+            <a:ext cx="5394960" cy="882396"/>
           </a:xfrm>
           <a:prstGeom prst="rect">
             <a:avLst/>
@@ -5796,14 +5796,14 @@
               <a:buNone/>
             </a:pPr>
             <a:r>
-              <a:rPr lang="en-US" sz="2200" dirty="0">
+              <a:rPr lang="en-US" sz="1800" dirty="0">
                 <a:solidFill>
                   <a:srgbClr val="1B1B1F"/>
                 </a:solidFill>
               </a:rPr>
               <a:t>Hashwert = Fingerabdruck fester Länge: einweg, kollisionsresistent, Lawineneffekt; Kollisionen gibt es immer (Schubfach)</a:t>
             </a:r>
-            <a:endParaRPr lang="en-US" sz="2200" dirty="0"/>
+            <a:endParaRPr lang="en-US" sz="1800" dirty="0"/>
           </a:p>
         </p:txBody>
       </p:sp>
@@ -5815,8 +5815,8 @@
         </p:nvSpPr>
         <p:spPr>
           <a:xfrm>
-            <a:off x="1508760" y="3095752"/>
-            <a:ext cx="9174175" cy="727456"/>
+            <a:off x="1508760" y="3250692"/>
+            <a:ext cx="5394960" cy="882396"/>
           </a:xfrm>
           <a:prstGeom prst="rect">
             <a:avLst/>
@@ -5832,7 +5832,7 @@
               <a:buNone/>
             </a:pPr>
             <a:r>
-              <a:rPr lang="en-US" sz="2200" dirty="0">
+              <a:rPr lang="en-US" sz="1800" dirty="0">
                 <a:solidFill>
                   <a:srgbClr val="1B1B1F"/>
                 </a:solidFill>
@@ -5840,7 +5840,7 @@
               <a:t>Signatur: Hash mit dem </a:t>
             </a:r>
             <a:r>
-              <a:rPr lang="en-US" sz="2200" b="1" dirty="0">
+              <a:rPr lang="en-US" sz="1800" b="1" dirty="0">
                 <a:solidFill>
                   <a:srgbClr val="1B1B1F"/>
                 </a:solidFill>
@@ -5848,7 +5848,7 @@
               <a:t>privaten</a:t>
             </a:r>
             <a:r>
-              <a:rPr lang="en-US" sz="2200" dirty="0">
+              <a:rPr lang="en-US" sz="1800" dirty="0">
                 <a:solidFill>
                   <a:srgbClr val="1B1B1F"/>
                 </a:solidFill>
@@ -5856,7 +5856,7 @@
               <a:t> Schlüssel des Absenders, Prüfung mit dessen </a:t>
             </a:r>
             <a:r>
-              <a:rPr lang="en-US" sz="2200" b="1" dirty="0">
+              <a:rPr lang="en-US" sz="1800" b="1" dirty="0">
                 <a:solidFill>
                   <a:srgbClr val="1B1B1F"/>
                 </a:solidFill>
@@ -5864,14 +5864,14 @@
               <a:t>öffentlichem</a:t>
             </a:r>
             <a:r>
-              <a:rPr lang="en-US" sz="2200" dirty="0">
+              <a:rPr lang="en-US" sz="1800" dirty="0">
                 <a:solidFill>
                   <a:srgbClr val="1B1B1F"/>
                 </a:solidFill>
               </a:rPr>
               <a:t> + Vergleich</a:t>
             </a:r>
-            <a:endParaRPr lang="en-US" sz="2200" dirty="0"/>
+            <a:endParaRPr lang="en-US" sz="1800" dirty="0"/>
           </a:p>
         </p:txBody>
       </p:sp>
@@ -5883,8 +5883,8 @@
         </p:nvSpPr>
         <p:spPr>
           <a:xfrm>
-            <a:off x="1508760" y="3951224"/>
-            <a:ext cx="9174175" cy="386588"/>
+            <a:off x="1508760" y="4261104"/>
+            <a:ext cx="5394960" cy="603504"/>
           </a:xfrm>
           <a:prstGeom prst="rect">
             <a:avLst/>
@@ -5900,14 +5900,14 @@
               <a:buNone/>
             </a:pPr>
             <a:r>
-              <a:rPr lang="en-US" sz="2200" dirty="0">
+              <a:rPr lang="en-US" sz="1800" dirty="0">
                 <a:solidFill>
                   <a:srgbClr val="1B1B1F"/>
                 </a:solidFill>
               </a:rPr>
               <a:t>Man-in-the-Middle: untergeschobener öffentlicher Schlüssel</a:t>
             </a:r>
-            <a:endParaRPr lang="en-US" sz="2200" dirty="0"/>
+            <a:endParaRPr lang="en-US" sz="1800" dirty="0"/>
           </a:p>
         </p:txBody>
       </p:sp>
@@ -5919,8 +5919,8 @@
         </p:nvSpPr>
         <p:spPr>
           <a:xfrm>
-            <a:off x="1508760" y="4465828"/>
-            <a:ext cx="9174175" cy="727456"/>
+            <a:off x="1508760" y="4992624"/>
+            <a:ext cx="5394960" cy="603504"/>
           </a:xfrm>
           <a:prstGeom prst="rect">
             <a:avLst/>
@@ -5936,7 +5936,7 @@
               <a:buNone/>
             </a:pPr>
             <a:r>
-              <a:rPr lang="en-US" sz="2200" dirty="0">
+              <a:rPr lang="en-US" sz="1800" dirty="0">
                 <a:solidFill>
                   <a:srgbClr val="1B1B1F"/>
                 </a:solidFill>
@@ -5944,7 +5944,7 @@
               <a:t>Zertifikat: CA signiert </a:t>
             </a:r>
             <a:r>
-              <a:rPr lang="en-US" sz="2200" b="1" dirty="0">
+              <a:rPr lang="en-US" sz="1800" b="1" dirty="0">
                 <a:solidFill>
                   <a:srgbClr val="1B1B1F"/>
                 </a:solidFill>
@@ -5952,14 +5952,14 @@
               <a:t>Schlüssel ↔ Identität</a:t>
             </a:r>
             <a:r>
-              <a:rPr lang="en-US" sz="2200" dirty="0">
+              <a:rPr lang="en-US" sz="1800" dirty="0">
                 <a:solidFill>
                   <a:srgbClr val="1B1B1F"/>
                 </a:solidFill>
               </a:rPr>
               <a:t>; TLS ist ein Hybridverfahren</a:t>
             </a:r>
-            <a:endParaRPr lang="en-US" sz="2200" dirty="0"/>
+            <a:endParaRPr lang="en-US" sz="1800" dirty="0"/>
           </a:p>
         </p:txBody>
       </p:sp>
@@ -9269,7 +9269,7 @@
                         <a:buNone/>
                       </a:pPr>
                       <a:r>
-                        <a:rPr lang="en-US" sz="1600" b="1" dirty="0">
+                        <a:rPr lang="en-US" sz="1700" b="1" dirty="0">
                           <a:solidFill>
                             <a:srgbClr val="1B1B1F"/>
                           </a:solidFill>
@@ -9279,7 +9279,7 @@
                         </a:rPr>
                         <a:t>Buchstabe</a:t>
                       </a:r>
-                      <a:endParaRPr lang="en-US" sz="1600" dirty="0">
+                      <a:endParaRPr lang="en-US" sz="1700" dirty="0">
                         <a:latin typeface="Calibri" charset="0"/>
                         <a:ea typeface="Calibri" charset="0"/>
                         <a:cs typeface="Calibri" charset="0"/>
@@ -9337,7 +9337,7 @@
                         <a:buNone/>
                       </a:pPr>
                       <a:r>
-                        <a:rPr lang="en-US" sz="1600" b="1" dirty="0">
+                        <a:rPr lang="en-US" sz="1700" b="1" dirty="0">
                           <a:solidFill>
                             <a:srgbClr val="1B1B1F"/>
                           </a:solidFill>
@@ -9347,7 +9347,7 @@
                         </a:rPr>
                         <a:t>Wert</a:t>
                       </a:r>
-                      <a:endParaRPr lang="en-US" sz="1600" dirty="0">
+                      <a:endParaRPr lang="en-US" sz="1700" dirty="0">
                         <a:latin typeface="Calibri" charset="0"/>
                         <a:ea typeface="Calibri" charset="0"/>
                         <a:cs typeface="Calibri" charset="0"/>
@@ -9405,7 +9405,7 @@
                         <a:buNone/>
                       </a:pPr>
                       <a:r>
-                        <a:rPr lang="en-US" sz="1600" b="1" dirty="0">
+                        <a:rPr lang="en-US" sz="1700" b="1" dirty="0">
                           <a:solidFill>
                             <a:srgbClr val="1B1B1F"/>
                           </a:solidFill>
@@ -9415,7 +9415,7 @@
                         </a:rPr>
                         <a:t>3 · h + Wert</a:t>
                       </a:r>
-                      <a:endParaRPr lang="en-US" sz="1600" dirty="0">
+                      <a:endParaRPr lang="en-US" sz="1700" dirty="0">
                         <a:latin typeface="Calibri" charset="0"/>
                         <a:ea typeface="Calibri" charset="0"/>
                         <a:cs typeface="Calibri" charset="0"/>
@@ -9473,7 +9473,7 @@
                         <a:buNone/>
                       </a:pPr>
                       <a:r>
-                        <a:rPr lang="en-US" sz="1600" b="1" dirty="0">
+                        <a:rPr lang="en-US" sz="1700" b="1" dirty="0">
                           <a:solidFill>
                             <a:srgbClr val="1B1B1F"/>
                           </a:solidFill>
@@ -9483,7 +9483,7 @@
                         </a:rPr>
                         <a:t>mod 32 → h</a:t>
                       </a:r>
-                      <a:endParaRPr lang="en-US" sz="1600" dirty="0">
+                      <a:endParaRPr lang="en-US" sz="1700" dirty="0">
                         <a:latin typeface="Calibri" charset="0"/>
                         <a:ea typeface="Calibri" charset="0"/>
                         <a:cs typeface="Calibri" charset="0"/>
@@ -9543,7 +9543,7 @@
                         <a:buNone/>
                       </a:pPr>
                       <a:r>
-                        <a:rPr lang="en-US" sz="1600" dirty="0">
+                        <a:rPr lang="en-US" sz="1700" dirty="0">
                           <a:solidFill>
                             <a:srgbClr val="1B1B1F"/>
                           </a:solidFill>
@@ -9553,7 +9553,7 @@
                         </a:rPr>
                         <a:t>(Start)</a:t>
                       </a:r>
-                      <a:endParaRPr lang="en-US" sz="1600" dirty="0">
+                      <a:endParaRPr lang="en-US" sz="1700" dirty="0">
                         <a:latin typeface="Calibri" charset="0"/>
                         <a:ea typeface="Calibri" charset="0"/>
                         <a:cs typeface="Calibri" charset="0"/>
@@ -9711,7 +9711,7 @@
                         <a:buNone/>
                       </a:pPr>
                       <a:r>
-                        <a:rPr lang="en-US" sz="1600" dirty="0">
+                        <a:rPr lang="en-US" sz="1700" dirty="0">
                           <a:solidFill>
                             <a:srgbClr val="1B1B1F"/>
                           </a:solidFill>
@@ -9721,7 +9721,7 @@
                         </a:rPr>
                         <a:t>5</a:t>
                       </a:r>
-                      <a:endParaRPr lang="en-US" sz="1600" dirty="0">
+                      <a:endParaRPr lang="en-US" sz="1700" dirty="0">
                         <a:latin typeface="Calibri" charset="0"/>
                         <a:ea typeface="Calibri" charset="0"/>
                         <a:cs typeface="Calibri" charset="0"/>
@@ -9781,7 +9781,7 @@
                         <a:buNone/>
                       </a:pPr>
                       <a:r>
-                        <a:rPr lang="en-US" sz="1600" dirty="0">
+                        <a:rPr lang="en-US" sz="1700" dirty="0">
                           <a:solidFill>
                             <a:srgbClr val="1B1B1F"/>
                           </a:solidFill>
@@ -9791,7 +9791,7 @@
                         </a:rPr>
                         <a:t>M</a:t>
                       </a:r>
-                      <a:endParaRPr lang="en-US" sz="1600" dirty="0">
+                      <a:endParaRPr lang="en-US" sz="1700" dirty="0">
                         <a:latin typeface="Calibri" charset="0"/>
                         <a:ea typeface="Calibri" charset="0"/>
                         <a:cs typeface="Calibri" charset="0"/>
@@ -9849,7 +9849,7 @@
                         <a:buNone/>
                       </a:pPr>
                       <a:r>
-                        <a:rPr lang="en-US" sz="1600" dirty="0">
+                        <a:rPr lang="en-US" sz="1700" dirty="0">
                           <a:solidFill>
                             <a:srgbClr val="1B1B1F"/>
                           </a:solidFill>
@@ -9859,7 +9859,7 @@
                         </a:rPr>
                         <a:t>13</a:t>
                       </a:r>
-                      <a:endParaRPr lang="en-US" sz="1600" dirty="0">
+                      <a:endParaRPr lang="en-US" sz="1700" dirty="0">
                         <a:latin typeface="Calibri" charset="0"/>
                         <a:ea typeface="Calibri" charset="0"/>
                         <a:cs typeface="Calibri" charset="0"/>
@@ -9917,7 +9917,7 @@
                         <a:buNone/>
                       </a:pPr>
                       <a:r>
-                        <a:rPr lang="en-US" sz="1600" dirty="0">
+                        <a:rPr lang="en-US" sz="1700" dirty="0">
                           <a:solidFill>
                             <a:srgbClr val="1B1B1F"/>
                           </a:solidFill>
@@ -9927,7 +9927,7 @@
                         </a:rPr>
                         <a:t>15 + 13 = 28</a:t>
                       </a:r>
-                      <a:endParaRPr lang="en-US" sz="1600" dirty="0">
+                      <a:endParaRPr lang="en-US" sz="1700" dirty="0">
                         <a:latin typeface="Calibri" charset="0"/>
                         <a:ea typeface="Calibri" charset="0"/>
                         <a:cs typeface="Calibri" charset="0"/>
@@ -9985,7 +9985,7 @@
                         <a:buNone/>
                       </a:pPr>
                       <a:r>
-                        <a:rPr lang="en-US" sz="1600" dirty="0">
+                        <a:rPr lang="en-US" sz="1700" dirty="0">
                           <a:solidFill>
                             <a:srgbClr val="1B1B1F"/>
                           </a:solidFill>
@@ -9995,7 +9995,7 @@
                         </a:rPr>
                         <a:t>28</a:t>
                       </a:r>
-                      <a:endParaRPr lang="en-US" sz="1600" dirty="0">
+                      <a:endParaRPr lang="en-US" sz="1700" dirty="0">
                         <a:latin typeface="Calibri" charset="0"/>
                         <a:ea typeface="Calibri" charset="0"/>
                         <a:cs typeface="Calibri" charset="0"/>
@@ -10055,7 +10055,7 @@
                         <a:buNone/>
                       </a:pPr>
                       <a:r>
-                        <a:rPr lang="en-US" sz="1600" dirty="0">
+                        <a:rPr lang="en-US" sz="1700" dirty="0">
                           <a:solidFill>
                             <a:srgbClr val="1B1B1F"/>
                           </a:solidFill>
@@ -10065,7 +10065,7 @@
                         </a:rPr>
                         <a:t>O</a:t>
                       </a:r>
-                      <a:endParaRPr lang="en-US" sz="1600" dirty="0">
+                      <a:endParaRPr lang="en-US" sz="1700" dirty="0">
                         <a:latin typeface="Calibri" charset="0"/>
                         <a:ea typeface="Calibri" charset="0"/>
                         <a:cs typeface="Calibri" charset="0"/>
@@ -10123,7 +10123,7 @@
                         <a:buNone/>
                       </a:pPr>
                       <a:r>
-                        <a:rPr lang="en-US" sz="1600" dirty="0">
+                        <a:rPr lang="en-US" sz="1700" dirty="0">
                           <a:solidFill>
                             <a:srgbClr val="1B1B1F"/>
                           </a:solidFill>
@@ -10133,7 +10133,7 @@
                         </a:rPr>
                         <a:t>15</a:t>
                       </a:r>
-                      <a:endParaRPr lang="en-US" sz="1600" dirty="0">
+                      <a:endParaRPr lang="en-US" sz="1700" dirty="0">
                         <a:latin typeface="Calibri" charset="0"/>
                         <a:ea typeface="Calibri" charset="0"/>
                         <a:cs typeface="Calibri" charset="0"/>
@@ -10191,7 +10191,7 @@
                         <a:buNone/>
                       </a:pPr>
                       <a:r>
-                        <a:rPr lang="en-US" sz="1600" dirty="0">
+                        <a:rPr lang="en-US" sz="1700" dirty="0">
                           <a:solidFill>
                             <a:srgbClr val="1B1B1F"/>
                           </a:solidFill>
@@ -10201,7 +10201,7 @@
                         </a:rPr>
                         <a:t>84 + 15 = 99</a:t>
                       </a:r>
-                      <a:endParaRPr lang="en-US" sz="1600" dirty="0">
+                      <a:endParaRPr lang="en-US" sz="1700" dirty="0">
                         <a:latin typeface="Calibri" charset="0"/>
                         <a:ea typeface="Calibri" charset="0"/>
                         <a:cs typeface="Calibri" charset="0"/>
@@ -10259,7 +10259,7 @@
                         <a:buNone/>
                       </a:pPr>
                       <a:r>
-                        <a:rPr lang="en-US" sz="1600" dirty="0">
+                        <a:rPr lang="en-US" sz="1700" dirty="0">
                           <a:solidFill>
                             <a:srgbClr val="1B1B1F"/>
                           </a:solidFill>
@@ -10269,7 +10269,7 @@
                         </a:rPr>
                         <a:t>3</a:t>
                       </a:r>
-                      <a:endParaRPr lang="en-US" sz="1600" dirty="0">
+                      <a:endParaRPr lang="en-US" sz="1700" dirty="0">
                         <a:latin typeface="Calibri" charset="0"/>
                         <a:ea typeface="Calibri" charset="0"/>
                         <a:cs typeface="Calibri" charset="0"/>
@@ -10329,7 +10329,7 @@
                         <a:buNone/>
                       </a:pPr>
                       <a:r>
-                        <a:rPr lang="en-US" sz="1600" dirty="0">
+                        <a:rPr lang="en-US" sz="1700" dirty="0">
                           <a:solidFill>
                             <a:srgbClr val="1B1B1F"/>
                           </a:solidFill>
@@ -10339,7 +10339,7 @@
                         </a:rPr>
                         <a:t>N</a:t>
                       </a:r>
-                      <a:endParaRPr lang="en-US" sz="1600" dirty="0">
+                      <a:endParaRPr lang="en-US" sz="1700" dirty="0">
                         <a:latin typeface="Calibri" charset="0"/>
                         <a:ea typeface="Calibri" charset="0"/>
                         <a:cs typeface="Calibri" charset="0"/>
@@ -10397,7 +10397,7 @@
                         <a:buNone/>
                       </a:pPr>
                       <a:r>
-                        <a:rPr lang="en-US" sz="1600" dirty="0">
+                        <a:rPr lang="en-US" sz="1700" dirty="0">
                           <a:solidFill>
                             <a:srgbClr val="1B1B1F"/>
                           </a:solidFill>
@@ -10407,7 +10407,7 @@
                         </a:rPr>
                         <a:t>14</a:t>
                       </a:r>
-                      <a:endParaRPr lang="en-US" sz="1600" dirty="0">
+                      <a:endParaRPr lang="en-US" sz="1700" dirty="0">
                         <a:latin typeface="Calibri" charset="0"/>
                         <a:ea typeface="Calibri" charset="0"/>
                         <a:cs typeface="Calibri" charset="0"/>
@@ -10465,7 +10465,7 @@
                         <a:buNone/>
                       </a:pPr>
                       <a:r>
-                        <a:rPr lang="en-US" sz="1600" dirty="0">
+                        <a:rPr lang="en-US" sz="1700" dirty="0">
                           <a:solidFill>
                             <a:srgbClr val="1B1B1F"/>
                           </a:solidFill>
@@ -10475,7 +10475,7 @@
                         </a:rPr>
                         <a:t>9 + 14 = 23</a:t>
                       </a:r>
-                      <a:endParaRPr lang="en-US" sz="1600" dirty="0">
+                      <a:endParaRPr lang="en-US" sz="1700" dirty="0">
                         <a:latin typeface="Calibri" charset="0"/>
                         <a:ea typeface="Calibri" charset="0"/>
                         <a:cs typeface="Calibri" charset="0"/>
@@ -10533,7 +10533,7 @@
                         <a:buNone/>
                       </a:pPr>
                       <a:r>
-                        <a:rPr lang="en-US" sz="1600" dirty="0">
+                        <a:rPr lang="en-US" sz="1700" dirty="0">
                           <a:solidFill>
                             <a:srgbClr val="1B1B1F"/>
                           </a:solidFill>
@@ -10543,7 +10543,7 @@
                         </a:rPr>
                         <a:t>23</a:t>
                       </a:r>
-                      <a:endParaRPr lang="en-US" sz="1600" dirty="0">
+                      <a:endParaRPr lang="en-US" sz="1700" dirty="0">
                         <a:latin typeface="Calibri" charset="0"/>
                         <a:ea typeface="Calibri" charset="0"/>
                         <a:cs typeface="Calibri" charset="0"/>
@@ -10603,7 +10603,7 @@
                         <a:buNone/>
                       </a:pPr>
                       <a:r>
-                        <a:rPr lang="en-US" sz="1600" dirty="0">
+                        <a:rPr lang="en-US" sz="1700" dirty="0">
                           <a:solidFill>
                             <a:srgbClr val="1B1B1F"/>
                           </a:solidFill>
@@ -10613,7 +10613,7 @@
                         </a:rPr>
                         <a:t>D</a:t>
                       </a:r>
-                      <a:endParaRPr lang="en-US" sz="1600" dirty="0">
+                      <a:endParaRPr lang="en-US" sz="1700" dirty="0">
                         <a:latin typeface="Calibri" charset="0"/>
                         <a:ea typeface="Calibri" charset="0"/>
                         <a:cs typeface="Calibri" charset="0"/>
@@ -10658,7 +10658,7 @@
                       <a:tailEnd type="none" w="med" len="med"/>
                     </a:lnB>
                     <a:solidFill>
-                      <a:srgbClr val="FFFFFF"/>
+                      <a:srgbClr val="F3E1C3"/>
                     </a:solidFill>
                   </a:tcPr>
                 </a:tc>
@@ -10671,7 +10671,7 @@
                         <a:buNone/>
                       </a:pPr>
                       <a:r>
-                        <a:rPr lang="en-US" sz="1600" dirty="0">
+                        <a:rPr lang="en-US" sz="1700" dirty="0">
                           <a:solidFill>
                             <a:srgbClr val="1B1B1F"/>
                           </a:solidFill>
@@ -10681,7 +10681,7 @@
                         </a:rPr>
                         <a:t>4</a:t>
                       </a:r>
-                      <a:endParaRPr lang="en-US" sz="1600" dirty="0">
+                      <a:endParaRPr lang="en-US" sz="1700" dirty="0">
                         <a:latin typeface="Calibri" charset="0"/>
                         <a:ea typeface="Calibri" charset="0"/>
                         <a:cs typeface="Calibri" charset="0"/>
@@ -10726,7 +10726,7 @@
                       <a:tailEnd type="none" w="med" len="med"/>
                     </a:lnB>
                     <a:solidFill>
-                      <a:srgbClr val="FFFFFF"/>
+                      <a:srgbClr val="F3E1C3"/>
                     </a:solidFill>
                   </a:tcPr>
                 </a:tc>
@@ -10739,7 +10739,7 @@
                         <a:buNone/>
                       </a:pPr>
                       <a:r>
-                        <a:rPr lang="en-US" sz="1600" dirty="0">
+                        <a:rPr lang="en-US" sz="1700" dirty="0">
                           <a:solidFill>
                             <a:srgbClr val="1B1B1F"/>
                           </a:solidFill>
@@ -10749,7 +10749,7 @@
                         </a:rPr>
                         <a:t>69 + 4 = 73</a:t>
                       </a:r>
-                      <a:endParaRPr lang="en-US" sz="1600" dirty="0">
+                      <a:endParaRPr lang="en-US" sz="1700" dirty="0">
                         <a:latin typeface="Calibri" charset="0"/>
                         <a:ea typeface="Calibri" charset="0"/>
                         <a:cs typeface="Calibri" charset="0"/>
@@ -10794,7 +10794,7 @@
                       <a:tailEnd type="none" w="med" len="med"/>
                     </a:lnB>
                     <a:solidFill>
-                      <a:srgbClr val="FFFFFF"/>
+                      <a:srgbClr val="F3E1C3"/>
                     </a:solidFill>
                   </a:tcPr>
                 </a:tc>
@@ -10807,7 +10807,7 @@
                         <a:buNone/>
                       </a:pPr>
                       <a:r>
-                        <a:rPr lang="en-US" sz="1600" b="1" dirty="0">
+                        <a:rPr lang="en-US" sz="1700" b="1" dirty="0">
                           <a:solidFill>
                             <a:srgbClr val="1B1B1F"/>
                           </a:solidFill>
@@ -10817,7 +10817,7 @@
                         </a:rPr>
                         <a:t>9</a:t>
                       </a:r>
-                      <a:endParaRPr lang="en-US" sz="1600" dirty="0">
+                      <a:endParaRPr lang="en-US" sz="1700" dirty="0">
                         <a:latin typeface="Calibri" charset="0"/>
                         <a:ea typeface="Calibri" charset="0"/>
                         <a:cs typeface="Calibri" charset="0"/>
@@ -10862,7 +10862,7 @@
                       <a:tailEnd type="none" w="med" len="med"/>
                     </a:lnB>
                     <a:solidFill>
-                      <a:srgbClr val="FFFFFF"/>
+                      <a:srgbClr val="F3E1C3"/>
                     </a:solidFill>
                   </a:tcPr>
                 </a:tc>
@@ -11603,7 +11603,7 @@
                         <a:buNone/>
                       </a:pPr>
                       <a:r>
-                        <a:rPr lang="en-US" sz="1600" b="1" dirty="0">
+                        <a:rPr lang="en-US" sz="1800" b="1" dirty="0">
                           <a:solidFill>
                             <a:srgbClr val="1B1B1F"/>
                           </a:solidFill>
@@ -11613,7 +11613,7 @@
                         </a:rPr>
                         <a:t>Zwischenwerte h</a:t>
                       </a:r>
-                      <a:endParaRPr lang="en-US" sz="1600" dirty="0">
+                      <a:endParaRPr lang="en-US" sz="1800" dirty="0">
                         <a:latin typeface="Calibri" charset="0"/>
                         <a:ea typeface="Calibri" charset="0"/>
                         <a:cs typeface="Calibri" charset="0"/>
@@ -11671,7 +11671,7 @@
                         <a:buNone/>
                       </a:pPr>
                       <a:r>
-                        <a:rPr lang="en-US" sz="1600" b="1" dirty="0">
+                        <a:rPr lang="en-US" sz="1800" b="1" dirty="0">
                           <a:solidFill>
                             <a:srgbClr val="1B1B1F"/>
                           </a:solidFill>
@@ -11681,7 +11681,7 @@
                         </a:rPr>
                         <a:t>Hash</a:t>
                       </a:r>
-                      <a:endParaRPr lang="en-US" sz="1600" dirty="0">
+                      <a:endParaRPr lang="en-US" sz="1800" dirty="0">
                         <a:latin typeface="Calibri" charset="0"/>
                         <a:ea typeface="Calibri" charset="0"/>
                         <a:cs typeface="Calibri" charset="0"/>
@@ -11741,7 +11741,7 @@
                         <a:buNone/>
                       </a:pPr>
                       <a:r>
-                        <a:rPr lang="en-US" sz="1600" dirty="0">
+                        <a:rPr lang="en-US" sz="1800" dirty="0">
                           <a:solidFill>
                             <a:srgbClr val="1B1B1F"/>
                           </a:solidFill>
@@ -11751,7 +11751,7 @@
                         </a:rPr>
                         <a:t>LINKS</a:t>
                       </a:r>
-                      <a:endParaRPr lang="en-US" sz="1600" dirty="0">
+                      <a:endParaRPr lang="en-US" sz="1800" dirty="0">
                         <a:latin typeface="Calibri" charset="0"/>
                         <a:ea typeface="Calibri" charset="0"/>
                         <a:cs typeface="Calibri" charset="0"/>
@@ -11809,7 +11809,7 @@
                         <a:buNone/>
                       </a:pPr>
                       <a:r>
-                        <a:rPr lang="en-US" sz="1600" dirty="0">
+                        <a:rPr lang="en-US" sz="1800" dirty="0">
                           <a:solidFill>
                             <a:srgbClr val="1B1B1F"/>
                           </a:solidFill>
@@ -11819,7 +11819,7 @@
                         </a:rPr>
                         <a:t>27 · 26 · 28 · 31 · 16</a:t>
                       </a:r>
-                      <a:endParaRPr lang="en-US" sz="1600" dirty="0">
+                      <a:endParaRPr lang="en-US" sz="1800" dirty="0">
                         <a:latin typeface="Calibri" charset="0"/>
                         <a:ea typeface="Calibri" charset="0"/>
                         <a:cs typeface="Calibri" charset="0"/>
@@ -11877,7 +11877,7 @@
                         <a:buNone/>
                       </a:pPr>
                       <a:r>
-                        <a:rPr lang="en-US" sz="1600" b="1" dirty="0">
+                        <a:rPr lang="en-US" sz="1800" b="1" dirty="0">
                           <a:solidFill>
                             <a:srgbClr val="1B1B1F"/>
                           </a:solidFill>
@@ -11887,7 +11887,7 @@
                         </a:rPr>
                         <a:t>16</a:t>
                       </a:r>
-                      <a:endParaRPr lang="en-US" sz="1600" dirty="0">
+                      <a:endParaRPr lang="en-US" sz="1800" dirty="0">
                         <a:latin typeface="Calibri" charset="0"/>
                         <a:ea typeface="Calibri" charset="0"/>
                         <a:cs typeface="Calibri" charset="0"/>
@@ -11947,7 +11947,7 @@
                         <a:buNone/>
                       </a:pPr>
                       <a:r>
-                        <a:rPr lang="en-US" sz="1600" dirty="0">
+                        <a:rPr lang="en-US" sz="1800" dirty="0">
                           <a:solidFill>
                             <a:srgbClr val="1B1B1F"/>
                           </a:solidFill>
@@ -11957,7 +11957,7 @@
                         </a:rPr>
                         <a:t>RECHTS</a:t>
                       </a:r>
-                      <a:endParaRPr lang="en-US" sz="1600" dirty="0">
+                      <a:endParaRPr lang="en-US" sz="1800" dirty="0">
                         <a:latin typeface="Calibri" charset="0"/>
                         <a:ea typeface="Calibri" charset="0"/>
                         <a:cs typeface="Calibri" charset="0"/>
@@ -12015,7 +12015,7 @@
                         <a:buNone/>
                       </a:pPr>
                       <a:r>
-                        <a:rPr lang="en-US" sz="1600" dirty="0">
+                        <a:rPr lang="en-US" sz="1800" dirty="0">
                           <a:solidFill>
                             <a:srgbClr val="1B1B1F"/>
                           </a:solidFill>
@@ -12025,7 +12025,7 @@
                         </a:rPr>
                         <a:t>1 · 8 · 27 · 25 · 31 · 16</a:t>
                       </a:r>
-                      <a:endParaRPr lang="en-US" sz="1600" dirty="0">
+                      <a:endParaRPr lang="en-US" sz="1800" dirty="0">
                         <a:latin typeface="Calibri" charset="0"/>
                         <a:ea typeface="Calibri" charset="0"/>
                         <a:cs typeface="Calibri" charset="0"/>
@@ -12083,7 +12083,7 @@
                         <a:buNone/>
                       </a:pPr>
                       <a:r>
-                        <a:rPr lang="en-US" sz="1600" b="1" dirty="0">
+                        <a:rPr lang="en-US" sz="1800" b="1" dirty="0">
                           <a:solidFill>
                             <a:srgbClr val="1B1B1F"/>
                           </a:solidFill>
@@ -12093,7 +12093,7 @@
                         </a:rPr>
                         <a:t>16</a:t>
                       </a:r>
-                      <a:endParaRPr lang="en-US" sz="1600" dirty="0">
+                      <a:endParaRPr lang="en-US" sz="1800" dirty="0">
                         <a:latin typeface="Calibri" charset="0"/>
                         <a:ea typeface="Calibri" charset="0"/>
                         <a:cs typeface="Calibri" charset="0"/>
